--- a/docs/pptx/entire/ritu-entire-scatter-egfr-epi.pptx
+++ b/docs/pptx/entire/ritu-entire-scatter-egfr-epi.pptx
@@ -4717,7 +4717,7 @@
           </p:nvSpPr>
           <p:spPr>
             <a:xfrm>
-              <a:off x="3724092" y="2517433"/>
+              <a:off x="3724093" y="2517434"/>
               <a:ext cx="49651" cy="49651"/>
             </a:xfrm>
             <a:prstGeom prst="ellipse">
@@ -29777,7 +29777,7 @@
           </p:nvSpPr>
           <p:spPr>
             <a:xfrm>
-              <a:off x="6228704" y="3051489"/>
+              <a:off x="6228702" y="3051486"/>
               <a:ext cx="49651" cy="49651"/>
             </a:xfrm>
             <a:prstGeom prst="ellipse">
@@ -36231,7 +36231,7 @@
                     <a:pt x="6240580" y="249410"/>
                   </a:lnTo>
                   <a:lnTo>
-                    <a:pt x="6328475" y="251490"/>
+                    <a:pt x="6328475" y="251489"/>
                   </a:lnTo>
                   <a:lnTo>
                     <a:pt x="6416371" y="253565"/>
@@ -36742,7 +36742,7 @@
                     <a:pt x="6240580" y="249410"/>
                   </a:lnTo>
                   <a:lnTo>
-                    <a:pt x="6328475" y="251490"/>
+                    <a:pt x="6328475" y="251489"/>
                   </a:lnTo>
                   <a:lnTo>
                     <a:pt x="6416371" y="253565"/>
@@ -36839,7 +36839,7 @@
                     <a:pt x="5625311" y="222963"/>
                   </a:lnTo>
                   <a:lnTo>
-                    <a:pt x="5537416" y="217934"/>
+                    <a:pt x="5537416" y="217933"/>
                   </a:lnTo>
                   <a:lnTo>
                     <a:pt x="5449520" y="212911"/>
@@ -37143,7 +37143,7 @@
                     <a:pt x="2461073" y="100119"/>
                   </a:lnTo>
                   <a:lnTo>
-                    <a:pt x="2548969" y="103695"/>
+                    <a:pt x="2548969" y="103694"/>
                   </a:lnTo>
                   <a:lnTo>
                     <a:pt x="2636864" y="107270"/>
@@ -37230,7 +37230,7 @@
                     <a:pt x="5010043" y="203814"/>
                   </a:lnTo>
                   <a:lnTo>
-                    <a:pt x="5097938" y="207390"/>
+                    <a:pt x="5097938" y="207389"/>
                   </a:lnTo>
                   <a:lnTo>
                     <a:pt x="5185834" y="210965"/>
